--- a/20260905/pde5_harness/sample_run/report/report_pde5.pptx
+++ b/20260905/pde5_harness/sample_run/report/report_pde5.pptx
@@ -13,7 +13,6 @@
     <p:sldId id="261" r:id="rId12"/>
     <p:sldId id="262" r:id="rId13"/>
     <p:sldId id="263" r:id="rId14"/>
-    <p:sldId id="264" r:id="rId15"/>
   </p:sldIdLst>
   <p:sldSz cx="12191695" cy="6858000" type="screen4x3"/>
   <p:notesSz cx="6858000" cy="9144000"/>
@@ -3226,7 +3225,7 @@
         <p:spPr>
           <a:xfrm>
             <a:off x="1051560" y="1965960"/>
-            <a:ext cx="10058400" cy="5753405"/>
+            <a:ext cx="10058400" cy="5646920"/>
           </a:xfrm>
           <a:prstGeom prst="rect">
             <a:avLst/>
@@ -3359,7 +3358,7 @@
                 </a:solidFill>
                 <a:latin typeface="Malgun Gothic"/>
               </a:rPr>
-              <a:t>하네스 구조</a:t>
+              <a:t>표적과 기전</a:t>
             </a:r>
           </a:p>
         </p:txBody>
@@ -3394,14 +3393,14 @@
                 </a:solidFill>
                 <a:latin typeface="Malgun Gothic"/>
               </a:rPr>
-              <a:t>계약 · 도구 · 봉투 · 게이트</a:t>
+              <a:t>PDE5A 가 cGMP 를 분해하고 저해제가 그것을 막는다</a:t>
             </a:r>
           </a:p>
         </p:txBody>
       </p:sp>
       <p:pic>
         <p:nvPicPr>
-          <p:cNvPr id="6" name="Picture 5" descr="fig2_pipeline.png"/>
+          <p:cNvPr id="6" name="Picture 5" descr="fig2_pathway.png"/>
           <p:cNvPicPr>
             <a:picLocks noChangeAspect="1"/>
           </p:cNvPicPr>
@@ -3416,7 +3415,7 @@
         <p:spPr>
           <a:xfrm>
             <a:off x="822960" y="1691640"/>
-            <a:ext cx="10515600" cy="5535161"/>
+            <a:ext cx="10515600" cy="4556226"/>
           </a:xfrm>
           <a:prstGeom prst="rect">
             <a:avLst/>
@@ -3549,7 +3548,7 @@
                 </a:solidFill>
                 <a:latin typeface="Malgun Gothic"/>
               </a:rPr>
-              <a:t>물성 공간</a:t>
+              <a:t>결합 부위</a:t>
             </a:r>
           </a:p>
         </p:txBody>
@@ -3584,14 +3583,14 @@
                 </a:solidFill>
                 <a:latin typeface="Malgun Gothic"/>
               </a:rPr>
-              <a:t>게이트 결과로 색을 나눈 실계산값</a:t>
+              <a:t>결정 자세와 도킹 자세</a:t>
             </a:r>
           </a:p>
         </p:txBody>
       </p:sp>
       <p:pic>
         <p:nvPicPr>
-          <p:cNvPr id="6" name="Picture 5" descr="fig3_property_space.png"/>
+          <p:cNvPr id="6" name="Picture 5" descr="fig7_binding_overview.png"/>
           <p:cNvPicPr>
             <a:picLocks noChangeAspect="1"/>
           </p:cNvPicPr>
@@ -3606,7 +3605,7 @@
         <p:spPr>
           <a:xfrm>
             <a:off x="822960" y="1691640"/>
-            <a:ext cx="10515600" cy="3781773"/>
+            <a:ext cx="10515600" cy="7010400"/>
           </a:xfrm>
           <a:prstGeom prst="rect">
             <a:avLst/>
@@ -3739,7 +3738,7 @@
                 </a:solidFill>
                 <a:latin typeface="Malgun Gothic"/>
               </a:rPr>
-              <a:t>단계별 잔존</a:t>
+              <a:t>포켓 근접</a:t>
             </a:r>
           </a:p>
         </p:txBody>
@@ -3774,14 +3773,14 @@
                 </a:solidFill>
                 <a:latin typeface="Malgun Gothic"/>
               </a:rPr>
-              <a:t>앞의 두 조건은 아무것도 탈락시키지 않았다</a:t>
+              <a:t>접촉 잔기와 극성 접촉</a:t>
             </a:r>
           </a:p>
         </p:txBody>
       </p:sp>
       <p:pic>
         <p:nvPicPr>
-          <p:cNvPr id="6" name="Picture 5" descr="fig4_gate_waterfall.png"/>
+          <p:cNvPr id="6" name="Picture 5" descr="fig8_binding_pocket.png"/>
           <p:cNvPicPr>
             <a:picLocks noChangeAspect="1"/>
           </p:cNvPicPr>
@@ -3796,7 +3795,7 @@
         <p:spPr>
           <a:xfrm>
             <a:off x="822960" y="1691640"/>
-            <a:ext cx="10515600" cy="3847051"/>
+            <a:ext cx="10515600" cy="7010400"/>
           </a:xfrm>
           <a:prstGeom prst="rect">
             <a:avLst/>
@@ -3929,7 +3928,7 @@
                 </a:solidFill>
                 <a:latin typeface="Malgun Gothic"/>
               </a:rPr>
-              <a:t>QED 임계</a:t>
+              <a:t>접촉 잔기</a:t>
             </a:r>
           </a:p>
         </p:txBody>
@@ -3964,14 +3963,14 @@
                 </a:solidFill>
                 <a:latin typeface="Malgun Gothic"/>
               </a:rPr>
-              <a:t>임계 하나가 통과와 탈락을 갈랐다</a:t>
+              <a:t>4 Å 이내 잔기 집계</a:t>
             </a:r>
           </a:p>
         </p:txBody>
       </p:sp>
       <p:pic>
         <p:nvPicPr>
-          <p:cNvPr id="6" name="Picture 5" descr="fig5_qed_threshold.png"/>
+          <p:cNvPr id="6" name="Picture 5" descr="fig9_contacts.png"/>
           <p:cNvPicPr>
             <a:picLocks noChangeAspect="1"/>
           </p:cNvPicPr>
@@ -3986,7 +3985,7 @@
         <p:spPr>
           <a:xfrm>
             <a:off x="822960" y="1691640"/>
-            <a:ext cx="10515600" cy="3777750"/>
+            <a:ext cx="10515600" cy="4106143"/>
           </a:xfrm>
           <a:prstGeom prst="rect">
             <a:avLst/>
@@ -4119,21 +4118,963 @@
                 </a:solidFill>
                 <a:latin typeface="Malgun Gothic"/>
               </a:rPr>
-              <a:t>임계 민감도</a:t>
-            </a:r>
-          </a:p>
-        </p:txBody>
-      </p:sp>
-      <p:sp>
-        <p:nvSpPr>
-          <p:cNvPr id="5" name="TextBox 4"/>
+              <a:t>화합물 물성 실계산값</a:t>
+            </a:r>
+          </a:p>
+        </p:txBody>
+      </p:sp>
+      <p:graphicFrame>
+        <p:nvGraphicFramePr>
+          <p:cNvPr id="5" name="Table 4"/>
+          <p:cNvGraphicFramePr>
+            <a:graphicFrameLocks noGrp="1"/>
+          </p:cNvGraphicFramePr>
+          <p:nvPr/>
+        </p:nvGraphicFramePr>
+        <p:xfrm>
+          <a:off x="640080" y="1463040"/>
+          <a:ext cx="10881360" cy="2560320"/>
+        </p:xfrm>
+        <a:graphic>
+          <a:graphicData uri="http://schemas.openxmlformats.org/drawingml/2006/table">
+            <a:tbl>
+              <a:tblPr firstRow="1" bandRow="1">
+                <a:tableStyleId>{5C22544A-7EE6-4342-B048-85BDC9FD1C3A}</a:tableStyleId>
+              </a:tblPr>
+              <a:tblGrid>
+                <a:gridCol w="1360170"/>
+                <a:gridCol w="1360170"/>
+                <a:gridCol w="1360170"/>
+                <a:gridCol w="1360170"/>
+                <a:gridCol w="1360170"/>
+                <a:gridCol w="1360170"/>
+                <a:gridCol w="1360170"/>
+                <a:gridCol w="1360170"/>
+              </a:tblGrid>
+              <a:tr h="365760">
+                <a:tc>
+                  <a:txBody>
+                    <a:bodyPr/>
+                    <a:lstStyle/>
+                    <a:p>
+                      <a:pPr algn="ctr"/>
+                      <a:r>
+                        <a:rPr sz="1000" b="1">
+                          <a:latin typeface="Malgun Gothic"/>
+                        </a:rPr>
+                        <a:t>ChEMBL ID</a:t>
+                      </a:r>
+                    </a:p>
+                  </a:txBody>
+                  <a:tcPr/>
+                </a:tc>
+                <a:tc>
+                  <a:txBody>
+                    <a:bodyPr/>
+                    <a:lstStyle/>
+                    <a:p>
+                      <a:pPr algn="ctr"/>
+                      <a:r>
+                        <a:rPr sz="1000" b="1">
+                          <a:latin typeface="Malgun Gothic"/>
+                        </a:rPr>
+                        <a:t>층</a:t>
+                      </a:r>
+                    </a:p>
+                  </a:txBody>
+                  <a:tcPr/>
+                </a:tc>
+                <a:tc>
+                  <a:txBody>
+                    <a:bodyPr/>
+                    <a:lstStyle/>
+                    <a:p>
+                      <a:pPr algn="ctr"/>
+                      <a:r>
+                        <a:rPr sz="1000" b="1">
+                          <a:latin typeface="Malgun Gothic"/>
+                        </a:rPr>
+                        <a:t>IC50 (nM)</a:t>
+                      </a:r>
+                    </a:p>
+                  </a:txBody>
+                  <a:tcPr/>
+                </a:tc>
+                <a:tc>
+                  <a:txBody>
+                    <a:bodyPr/>
+                    <a:lstStyle/>
+                    <a:p>
+                      <a:pPr algn="ctr"/>
+                      <a:r>
+                        <a:rPr sz="1000" b="1">
+                          <a:latin typeface="Malgun Gothic"/>
+                        </a:rPr>
+                        <a:t>pIC50</a:t>
+                      </a:r>
+                    </a:p>
+                  </a:txBody>
+                  <a:tcPr/>
+                </a:tc>
+                <a:tc>
+                  <a:txBody>
+                    <a:bodyPr/>
+                    <a:lstStyle/>
+                    <a:p>
+                      <a:pPr algn="ctr"/>
+                      <a:r>
+                        <a:rPr sz="1000" b="1">
+                          <a:latin typeface="Malgun Gothic"/>
+                        </a:rPr>
+                        <a:t>선택 자세 점수</a:t>
+                      </a:r>
+                    </a:p>
+                  </a:txBody>
+                  <a:tcPr/>
+                </a:tc>
+                <a:tc>
+                  <a:txBody>
+                    <a:bodyPr/>
+                    <a:lstStyle/>
+                    <a:p>
+                      <a:pPr algn="ctr"/>
+                      <a:r>
+                        <a:rPr sz="1000" b="1">
+                          <a:latin typeface="Malgun Gothic"/>
+                        </a:rPr>
+                        <a:t>1위 자세 점수</a:t>
+                      </a:r>
+                    </a:p>
+                  </a:txBody>
+                  <a:tcPr/>
+                </a:tc>
+                <a:tc>
+                  <a:txBody>
+                    <a:bodyPr/>
+                    <a:lstStyle/>
+                    <a:p>
+                      <a:pPr algn="ctr"/>
+                      <a:r>
+                        <a:rPr sz="1000" b="1">
+                          <a:latin typeface="Malgun Gothic"/>
+                        </a:rPr>
+                        <a:t>모드</a:t>
+                      </a:r>
+                    </a:p>
+                  </a:txBody>
+                  <a:tcPr/>
+                </a:tc>
+                <a:tc>
+                  <a:txBody>
+                    <a:bodyPr/>
+                    <a:lstStyle/>
+                    <a:p>
+                      <a:pPr algn="ctr"/>
+                      <a:r>
+                        <a:rPr sz="1000" b="1">
+                          <a:latin typeface="Malgun Gothic"/>
+                        </a:rPr>
+                        <a:t>MCS-RMSD (Å)</a:t>
+                      </a:r>
+                    </a:p>
+                  </a:txBody>
+                  <a:tcPr/>
+                </a:tc>
+              </a:tr>
+              <a:tr h="365760">
+                <a:tc>
+                  <a:txBody>
+                    <a:bodyPr/>
+                    <a:lstStyle/>
+                    <a:p>
+                      <a:pPr algn="ctr"/>
+                      <a:r>
+                        <a:rPr sz="1000" b="0">
+                          <a:latin typeface="Malgun Gothic"/>
+                        </a:rPr>
+                        <a:t>CHEMBL410215</a:t>
+                      </a:r>
+                    </a:p>
+                  </a:txBody>
+                  <a:tcPr/>
+                </a:tc>
+                <a:tc>
+                  <a:txBody>
+                    <a:bodyPr/>
+                    <a:lstStyle/>
+                    <a:p>
+                      <a:pPr algn="ctr"/>
+                      <a:r>
+                        <a:rPr sz="1000" b="0">
+                          <a:latin typeface="Malgun Gothic"/>
+                        </a:rPr>
+                        <a:t>strong</a:t>
+                      </a:r>
+                    </a:p>
+                  </a:txBody>
+                  <a:tcPr/>
+                </a:tc>
+                <a:tc>
+                  <a:txBody>
+                    <a:bodyPr/>
+                    <a:lstStyle/>
+                    <a:p>
+                      <a:pPr algn="ctr"/>
+                      <a:r>
+                        <a:rPr sz="1000" b="0">
+                          <a:latin typeface="Malgun Gothic"/>
+                        </a:rPr>
+                        <a:t>0.03</a:t>
+                      </a:r>
+                    </a:p>
+                  </a:txBody>
+                  <a:tcPr/>
+                </a:tc>
+                <a:tc>
+                  <a:txBody>
+                    <a:bodyPr/>
+                    <a:lstStyle/>
+                    <a:p>
+                      <a:pPr algn="ctr"/>
+                      <a:r>
+                        <a:rPr sz="1000" b="0">
+                          <a:latin typeface="Malgun Gothic"/>
+                        </a:rPr>
+                        <a:t>10.52</a:t>
+                      </a:r>
+                    </a:p>
+                  </a:txBody>
+                  <a:tcPr/>
+                </a:tc>
+                <a:tc>
+                  <a:txBody>
+                    <a:bodyPr/>
+                    <a:lstStyle/>
+                    <a:p>
+                      <a:pPr algn="ctr"/>
+                      <a:r>
+                        <a:rPr sz="1000" b="0">
+                          <a:latin typeface="Malgun Gothic"/>
+                        </a:rPr>
+                        <a:t>-9.50</a:t>
+                      </a:r>
+                    </a:p>
+                  </a:txBody>
+                  <a:tcPr/>
+                </a:tc>
+                <a:tc>
+                  <a:txBody>
+                    <a:bodyPr/>
+                    <a:lstStyle/>
+                    <a:p>
+                      <a:pPr algn="ctr"/>
+                      <a:r>
+                        <a:rPr sz="1000" b="0">
+                          <a:latin typeface="Malgun Gothic"/>
+                        </a:rPr>
+                        <a:t>-11.40</a:t>
+                      </a:r>
+                    </a:p>
+                  </a:txBody>
+                  <a:tcPr/>
+                </a:tc>
+                <a:tc>
+                  <a:txBody>
+                    <a:bodyPr/>
+                    <a:lstStyle/>
+                    <a:p>
+                      <a:pPr algn="ctr"/>
+                      <a:r>
+                        <a:rPr sz="1000" b="0">
+                          <a:latin typeface="Malgun Gothic"/>
+                        </a:rPr>
+                        <a:t>8</a:t>
+                      </a:r>
+                    </a:p>
+                  </a:txBody>
+                  <a:tcPr/>
+                </a:tc>
+                <a:tc>
+                  <a:txBody>
+                    <a:bodyPr/>
+                    <a:lstStyle/>
+                    <a:p>
+                      <a:pPr algn="ctr"/>
+                      <a:r>
+                        <a:rPr sz="1000" b="0">
+                          <a:latin typeface="Malgun Gothic"/>
+                        </a:rPr>
+                        <a:t>3.599</a:t>
+                      </a:r>
+                    </a:p>
+                  </a:txBody>
+                  <a:tcPr/>
+                </a:tc>
+              </a:tr>
+              <a:tr h="365760">
+                <a:tc>
+                  <a:txBody>
+                    <a:bodyPr/>
+                    <a:lstStyle/>
+                    <a:p>
+                      <a:pPr algn="ctr"/>
+                      <a:r>
+                        <a:rPr sz="1000" b="0">
+                          <a:latin typeface="Malgun Gothic"/>
+                        </a:rPr>
+                        <a:t>CHEMBL553075</a:t>
+                      </a:r>
+                    </a:p>
+                  </a:txBody>
+                  <a:tcPr/>
+                </a:tc>
+                <a:tc>
+                  <a:txBody>
+                    <a:bodyPr/>
+                    <a:lstStyle/>
+                    <a:p>
+                      <a:pPr algn="ctr"/>
+                      <a:r>
+                        <a:rPr sz="1000" b="0">
+                          <a:latin typeface="Malgun Gothic"/>
+                        </a:rPr>
+                        <a:t>strong</a:t>
+                      </a:r>
+                    </a:p>
+                  </a:txBody>
+                  <a:tcPr/>
+                </a:tc>
+                <a:tc>
+                  <a:txBody>
+                    <a:bodyPr/>
+                    <a:lstStyle/>
+                    <a:p>
+                      <a:pPr algn="ctr"/>
+                      <a:r>
+                        <a:rPr sz="1000" b="0">
+                          <a:latin typeface="Malgun Gothic"/>
+                        </a:rPr>
+                        <a:t>0.53</a:t>
+                      </a:r>
+                    </a:p>
+                  </a:txBody>
+                  <a:tcPr/>
+                </a:tc>
+                <a:tc>
+                  <a:txBody>
+                    <a:bodyPr/>
+                    <a:lstStyle/>
+                    <a:p>
+                      <a:pPr algn="ctr"/>
+                      <a:r>
+                        <a:rPr sz="1000" b="0">
+                          <a:latin typeface="Malgun Gothic"/>
+                        </a:rPr>
+                        <a:t>9.28</a:t>
+                      </a:r>
+                    </a:p>
+                  </a:txBody>
+                  <a:tcPr/>
+                </a:tc>
+                <a:tc>
+                  <a:txBody>
+                    <a:bodyPr/>
+                    <a:lstStyle/>
+                    <a:p>
+                      <a:pPr algn="ctr"/>
+                      <a:r>
+                        <a:rPr sz="1000" b="0">
+                          <a:latin typeface="Malgun Gothic"/>
+                        </a:rPr>
+                        <a:t>-9.90</a:t>
+                      </a:r>
+                    </a:p>
+                  </a:txBody>
+                  <a:tcPr/>
+                </a:tc>
+                <a:tc>
+                  <a:txBody>
+                    <a:bodyPr/>
+                    <a:lstStyle/>
+                    <a:p>
+                      <a:pPr algn="ctr"/>
+                      <a:r>
+                        <a:rPr sz="1000" b="0">
+                          <a:latin typeface="Malgun Gothic"/>
+                        </a:rPr>
+                        <a:t>-10.30</a:t>
+                      </a:r>
+                    </a:p>
+                  </a:txBody>
+                  <a:tcPr/>
+                </a:tc>
+                <a:tc>
+                  <a:txBody>
+                    <a:bodyPr/>
+                    <a:lstStyle/>
+                    <a:p>
+                      <a:pPr algn="ctr"/>
+                      <a:r>
+                        <a:rPr sz="1000" b="0">
+                          <a:latin typeface="Malgun Gothic"/>
+                        </a:rPr>
+                        <a:t>5</a:t>
+                      </a:r>
+                    </a:p>
+                  </a:txBody>
+                  <a:tcPr/>
+                </a:tc>
+                <a:tc>
+                  <a:txBody>
+                    <a:bodyPr/>
+                    <a:lstStyle/>
+                    <a:p>
+                      <a:pPr algn="ctr"/>
+                      <a:r>
+                        <a:rPr sz="1000" b="0">
+                          <a:latin typeface="Malgun Gothic"/>
+                        </a:rPr>
+                        <a:t>2.675</a:t>
+                      </a:r>
+                    </a:p>
+                  </a:txBody>
+                  <a:tcPr/>
+                </a:tc>
+              </a:tr>
+              <a:tr h="365760">
+                <a:tc>
+                  <a:txBody>
+                    <a:bodyPr/>
+                    <a:lstStyle/>
+                    <a:p>
+                      <a:pPr algn="ctr"/>
+                      <a:r>
+                        <a:rPr sz="1000" b="0">
+                          <a:latin typeface="Malgun Gothic"/>
+                        </a:rPr>
+                        <a:t>CHEMBL361582</a:t>
+                      </a:r>
+                    </a:p>
+                  </a:txBody>
+                  <a:tcPr/>
+                </a:tc>
+                <a:tc>
+                  <a:txBody>
+                    <a:bodyPr/>
+                    <a:lstStyle/>
+                    <a:p>
+                      <a:pPr algn="ctr"/>
+                      <a:r>
+                        <a:rPr sz="1000" b="0">
+                          <a:latin typeface="Malgun Gothic"/>
+                        </a:rPr>
+                        <a:t>strong</a:t>
+                      </a:r>
+                    </a:p>
+                  </a:txBody>
+                  <a:tcPr/>
+                </a:tc>
+                <a:tc>
+                  <a:txBody>
+                    <a:bodyPr/>
+                    <a:lstStyle/>
+                    <a:p>
+                      <a:pPr algn="ctr"/>
+                      <a:r>
+                        <a:rPr sz="1000" b="0">
+                          <a:latin typeface="Malgun Gothic"/>
+                        </a:rPr>
+                        <a:t>1</a:t>
+                      </a:r>
+                    </a:p>
+                  </a:txBody>
+                  <a:tcPr/>
+                </a:tc>
+                <a:tc>
+                  <a:txBody>
+                    <a:bodyPr/>
+                    <a:lstStyle/>
+                    <a:p>
+                      <a:pPr algn="ctr"/>
+                      <a:r>
+                        <a:rPr sz="1000" b="0">
+                          <a:latin typeface="Malgun Gothic"/>
+                        </a:rPr>
+                        <a:t>9.00</a:t>
+                      </a:r>
+                    </a:p>
+                  </a:txBody>
+                  <a:tcPr/>
+                </a:tc>
+                <a:tc>
+                  <a:txBody>
+                    <a:bodyPr/>
+                    <a:lstStyle/>
+                    <a:p>
+                      <a:pPr algn="ctr"/>
+                      <a:r>
+                        <a:rPr sz="1000" b="0">
+                          <a:latin typeface="Malgun Gothic"/>
+                        </a:rPr>
+                        <a:t>-10.20</a:t>
+                      </a:r>
+                    </a:p>
+                  </a:txBody>
+                  <a:tcPr/>
+                </a:tc>
+                <a:tc>
+                  <a:txBody>
+                    <a:bodyPr/>
+                    <a:lstStyle/>
+                    <a:p>
+                      <a:pPr algn="ctr"/>
+                      <a:r>
+                        <a:rPr sz="1000" b="0">
+                          <a:latin typeface="Malgun Gothic"/>
+                        </a:rPr>
+                        <a:t>-10.60</a:t>
+                      </a:r>
+                    </a:p>
+                  </a:txBody>
+                  <a:tcPr/>
+                </a:tc>
+                <a:tc>
+                  <a:txBody>
+                    <a:bodyPr/>
+                    <a:lstStyle/>
+                    <a:p>
+                      <a:pPr algn="ctr"/>
+                      <a:r>
+                        <a:rPr sz="1000" b="0">
+                          <a:latin typeface="Malgun Gothic"/>
+                        </a:rPr>
+                        <a:t>3</a:t>
+                      </a:r>
+                    </a:p>
+                  </a:txBody>
+                  <a:tcPr/>
+                </a:tc>
+                <a:tc>
+                  <a:txBody>
+                    <a:bodyPr/>
+                    <a:lstStyle/>
+                    <a:p>
+                      <a:pPr algn="ctr"/>
+                      <a:r>
+                        <a:rPr sz="1000" b="0">
+                          <a:latin typeface="Malgun Gothic"/>
+                        </a:rPr>
+                        <a:t>1.798</a:t>
+                      </a:r>
+                    </a:p>
+                  </a:txBody>
+                  <a:tcPr/>
+                </a:tc>
+              </a:tr>
+              <a:tr h="365760">
+                <a:tc>
+                  <a:txBody>
+                    <a:bodyPr/>
+                    <a:lstStyle/>
+                    <a:p>
+                      <a:pPr algn="ctr"/>
+                      <a:r>
+                        <a:rPr sz="1000" b="0">
+                          <a:latin typeface="Malgun Gothic"/>
+                        </a:rPr>
+                        <a:t>CHEMBL136498</a:t>
+                      </a:r>
+                    </a:p>
+                  </a:txBody>
+                  <a:tcPr/>
+                </a:tc>
+                <a:tc>
+                  <a:txBody>
+                    <a:bodyPr/>
+                    <a:lstStyle/>
+                    <a:p>
+                      <a:pPr algn="ctr"/>
+                      <a:r>
+                        <a:rPr sz="1000" b="0">
+                          <a:latin typeface="Malgun Gothic"/>
+                        </a:rPr>
+                        <a:t>strong</a:t>
+                      </a:r>
+                    </a:p>
+                  </a:txBody>
+                  <a:tcPr/>
+                </a:tc>
+                <a:tc>
+                  <a:txBody>
+                    <a:bodyPr/>
+                    <a:lstStyle/>
+                    <a:p>
+                      <a:pPr algn="ctr"/>
+                      <a:r>
+                        <a:rPr sz="1000" b="0">
+                          <a:latin typeface="Malgun Gothic"/>
+                        </a:rPr>
+                        <a:t>1.74</a:t>
+                      </a:r>
+                    </a:p>
+                  </a:txBody>
+                  <a:tcPr/>
+                </a:tc>
+                <a:tc>
+                  <a:txBody>
+                    <a:bodyPr/>
+                    <a:lstStyle/>
+                    <a:p>
+                      <a:pPr algn="ctr"/>
+                      <a:r>
+                        <a:rPr sz="1000" b="0">
+                          <a:latin typeface="Malgun Gothic"/>
+                        </a:rPr>
+                        <a:t>8.76</a:t>
+                      </a:r>
+                    </a:p>
+                  </a:txBody>
+                  <a:tcPr/>
+                </a:tc>
+                <a:tc>
+                  <a:txBody>
+                    <a:bodyPr/>
+                    <a:lstStyle/>
+                    <a:p>
+                      <a:pPr algn="ctr"/>
+                      <a:r>
+                        <a:rPr sz="1000" b="0">
+                          <a:latin typeface="Malgun Gothic"/>
+                        </a:rPr>
+                        <a:t>-12.40</a:t>
+                      </a:r>
+                    </a:p>
+                  </a:txBody>
+                  <a:tcPr/>
+                </a:tc>
+                <a:tc>
+                  <a:txBody>
+                    <a:bodyPr/>
+                    <a:lstStyle/>
+                    <a:p>
+                      <a:pPr algn="ctr"/>
+                      <a:r>
+                        <a:rPr sz="1000" b="0">
+                          <a:latin typeface="Malgun Gothic"/>
+                        </a:rPr>
+                        <a:t>-13.70</a:t>
+                      </a:r>
+                    </a:p>
+                  </a:txBody>
+                  <a:tcPr/>
+                </a:tc>
+                <a:tc>
+                  <a:txBody>
+                    <a:bodyPr/>
+                    <a:lstStyle/>
+                    <a:p>
+                      <a:pPr algn="ctr"/>
+                      <a:r>
+                        <a:rPr sz="1000" b="0">
+                          <a:latin typeface="Malgun Gothic"/>
+                        </a:rPr>
+                        <a:t>2</a:t>
+                      </a:r>
+                    </a:p>
+                  </a:txBody>
+                  <a:tcPr/>
+                </a:tc>
+                <a:tc>
+                  <a:txBody>
+                    <a:bodyPr/>
+                    <a:lstStyle/>
+                    <a:p>
+                      <a:pPr algn="ctr"/>
+                      <a:r>
+                        <a:rPr sz="1000" b="0">
+                          <a:latin typeface="Malgun Gothic"/>
+                        </a:rPr>
+                        <a:t>2.475</a:t>
+                      </a:r>
+                    </a:p>
+                  </a:txBody>
+                  <a:tcPr/>
+                </a:tc>
+              </a:tr>
+              <a:tr h="365760">
+                <a:tc>
+                  <a:txBody>
+                    <a:bodyPr/>
+                    <a:lstStyle/>
+                    <a:p>
+                      <a:pPr algn="ctr"/>
+                      <a:r>
+                        <a:rPr sz="1000" b="0">
+                          <a:latin typeface="Malgun Gothic"/>
+                        </a:rPr>
+                        <a:t>CHEMBL544310</a:t>
+                      </a:r>
+                    </a:p>
+                  </a:txBody>
+                  <a:tcPr/>
+                </a:tc>
+                <a:tc>
+                  <a:txBody>
+                    <a:bodyPr/>
+                    <a:lstStyle/>
+                    <a:p>
+                      <a:pPr algn="ctr"/>
+                      <a:r>
+                        <a:rPr sz="1000" b="0">
+                          <a:latin typeface="Malgun Gothic"/>
+                        </a:rPr>
+                        <a:t>strong</a:t>
+                      </a:r>
+                    </a:p>
+                  </a:txBody>
+                  <a:tcPr/>
+                </a:tc>
+                <a:tc>
+                  <a:txBody>
+                    <a:bodyPr/>
+                    <a:lstStyle/>
+                    <a:p>
+                      <a:pPr algn="ctr"/>
+                      <a:r>
+                        <a:rPr sz="1000" b="0">
+                          <a:latin typeface="Malgun Gothic"/>
+                        </a:rPr>
+                        <a:t>2.7</a:t>
+                      </a:r>
+                    </a:p>
+                  </a:txBody>
+                  <a:tcPr/>
+                </a:tc>
+                <a:tc>
+                  <a:txBody>
+                    <a:bodyPr/>
+                    <a:lstStyle/>
+                    <a:p>
+                      <a:pPr algn="ctr"/>
+                      <a:r>
+                        <a:rPr sz="1000" b="0">
+                          <a:latin typeface="Malgun Gothic"/>
+                        </a:rPr>
+                        <a:t>8.57</a:t>
+                      </a:r>
+                    </a:p>
+                  </a:txBody>
+                  <a:tcPr/>
+                </a:tc>
+                <a:tc>
+                  <a:txBody>
+                    <a:bodyPr/>
+                    <a:lstStyle/>
+                    <a:p>
+                      <a:pPr algn="ctr"/>
+                      <a:r>
+                        <a:rPr sz="1000" b="0">
+                          <a:latin typeface="Malgun Gothic"/>
+                        </a:rPr>
+                        <a:t>-9.80</a:t>
+                      </a:r>
+                    </a:p>
+                  </a:txBody>
+                  <a:tcPr/>
+                </a:tc>
+                <a:tc>
+                  <a:txBody>
+                    <a:bodyPr/>
+                    <a:lstStyle/>
+                    <a:p>
+                      <a:pPr algn="ctr"/>
+                      <a:r>
+                        <a:rPr sz="1000" b="0">
+                          <a:latin typeface="Malgun Gothic"/>
+                        </a:rPr>
+                        <a:t>-10.20</a:t>
+                      </a:r>
+                    </a:p>
+                  </a:txBody>
+                  <a:tcPr/>
+                </a:tc>
+                <a:tc>
+                  <a:txBody>
+                    <a:bodyPr/>
+                    <a:lstStyle/>
+                    <a:p>
+                      <a:pPr algn="ctr"/>
+                      <a:r>
+                        <a:rPr sz="1000" b="0">
+                          <a:latin typeface="Malgun Gothic"/>
+                        </a:rPr>
+                        <a:t>2</a:t>
+                      </a:r>
+                    </a:p>
+                  </a:txBody>
+                  <a:tcPr/>
+                </a:tc>
+                <a:tc>
+                  <a:txBody>
+                    <a:bodyPr/>
+                    <a:lstStyle/>
+                    <a:p>
+                      <a:pPr algn="ctr"/>
+                      <a:r>
+                        <a:rPr sz="1000" b="0">
+                          <a:latin typeface="Malgun Gothic"/>
+                        </a:rPr>
+                        <a:t>3.106</a:t>
+                      </a:r>
+                    </a:p>
+                  </a:txBody>
+                  <a:tcPr/>
+                </a:tc>
+              </a:tr>
+              <a:tr h="365760">
+                <a:tc>
+                  <a:txBody>
+                    <a:bodyPr/>
+                    <a:lstStyle/>
+                    <a:p>
+                      <a:pPr algn="ctr"/>
+                      <a:r>
+                        <a:rPr sz="1000" b="0">
+                          <a:latin typeface="Malgun Gothic"/>
+                        </a:rPr>
+                        <a:t>CHEMBL434135</a:t>
+                      </a:r>
+                    </a:p>
+                  </a:txBody>
+                  <a:tcPr/>
+                </a:tc>
+                <a:tc>
+                  <a:txBody>
+                    <a:bodyPr/>
+                    <a:lstStyle/>
+                    <a:p>
+                      <a:pPr algn="ctr"/>
+                      <a:r>
+                        <a:rPr sz="1000" b="0">
+                          <a:latin typeface="Malgun Gothic"/>
+                        </a:rPr>
+                        <a:t>strong</a:t>
+                      </a:r>
+                    </a:p>
+                  </a:txBody>
+                  <a:tcPr/>
+                </a:tc>
+                <a:tc>
+                  <a:txBody>
+                    <a:bodyPr/>
+                    <a:lstStyle/>
+                    <a:p>
+                      <a:pPr algn="ctr"/>
+                      <a:r>
+                        <a:rPr sz="1000" b="0">
+                          <a:latin typeface="Malgun Gothic"/>
+                        </a:rPr>
+                        <a:t>5</a:t>
+                      </a:r>
+                    </a:p>
+                  </a:txBody>
+                  <a:tcPr/>
+                </a:tc>
+                <a:tc>
+                  <a:txBody>
+                    <a:bodyPr/>
+                    <a:lstStyle/>
+                    <a:p>
+                      <a:pPr algn="ctr"/>
+                      <a:r>
+                        <a:rPr sz="1000" b="0">
+                          <a:latin typeface="Malgun Gothic"/>
+                        </a:rPr>
+                        <a:t>8.30</a:t>
+                      </a:r>
+                    </a:p>
+                  </a:txBody>
+                  <a:tcPr/>
+                </a:tc>
+                <a:tc>
+                  <a:txBody>
+                    <a:bodyPr/>
+                    <a:lstStyle/>
+                    <a:p>
+                      <a:pPr algn="ctr"/>
+                      <a:r>
+                        <a:rPr sz="1000" b="0">
+                          <a:latin typeface="Malgun Gothic"/>
+                        </a:rPr>
+                        <a:t>-9.90</a:t>
+                      </a:r>
+                    </a:p>
+                  </a:txBody>
+                  <a:tcPr/>
+                </a:tc>
+                <a:tc>
+                  <a:txBody>
+                    <a:bodyPr/>
+                    <a:lstStyle/>
+                    <a:p>
+                      <a:pPr algn="ctr"/>
+                      <a:r>
+                        <a:rPr sz="1000" b="0">
+                          <a:latin typeface="Malgun Gothic"/>
+                        </a:rPr>
+                        <a:t>-10.40</a:t>
+                      </a:r>
+                    </a:p>
+                  </a:txBody>
+                  <a:tcPr/>
+                </a:tc>
+                <a:tc>
+                  <a:txBody>
+                    <a:bodyPr/>
+                    <a:lstStyle/>
+                    <a:p>
+                      <a:pPr algn="ctr"/>
+                      <a:r>
+                        <a:rPr sz="1000" b="0">
+                          <a:latin typeface="Malgun Gothic"/>
+                        </a:rPr>
+                        <a:t>3</a:t>
+                      </a:r>
+                    </a:p>
+                  </a:txBody>
+                  <a:tcPr/>
+                </a:tc>
+                <a:tc>
+                  <a:txBody>
+                    <a:bodyPr/>
+                    <a:lstStyle/>
+                    <a:p>
+                      <a:pPr algn="ctr"/>
+                      <a:r>
+                        <a:rPr sz="1000" b="0">
+                          <a:latin typeface="Malgun Gothic"/>
+                        </a:rPr>
+                        <a:t>1.124</a:t>
+                      </a:r>
+                    </a:p>
+                  </a:txBody>
+                  <a:tcPr/>
+                </a:tc>
+              </a:tr>
+            </a:tbl>
+          </a:graphicData>
+        </a:graphic>
+      </p:graphicFrame>
+      <p:sp>
+        <p:nvSpPr>
+          <p:cNvPr id="6" name="TextBox 5"/>
           <p:cNvSpPr txBox="1"/>
           <p:nvPr/>
         </p:nvSpPr>
         <p:spPr>
           <a:xfrm>
-            <a:off x="548640" y="1207008"/>
-            <a:ext cx="11064240" cy="329184"/>
+            <a:off x="640080" y="4178808"/>
+            <a:ext cx="10881360" cy="548640"/>
           </a:xfrm>
           <a:prstGeom prst="rect">
             <a:avLst/>
@@ -4154,35 +5095,11 @@
                 </a:solidFill>
                 <a:latin typeface="Malgun Gothic"/>
               </a:rPr>
-              <a:t>측정값은 그대로, 임계만 옮겨 재집계</a:t>
-            </a:r>
-          </a:p>
-        </p:txBody>
-      </p:sp>
-      <p:pic>
-        <p:nvPicPr>
-          <p:cNvPr id="6" name="Picture 5" descr="fig6_threshold_sweep.png"/>
-          <p:cNvPicPr>
-            <a:picLocks noChangeAspect="1"/>
-          </p:cNvPicPr>
-          <p:nvPr/>
-        </p:nvPicPr>
-        <p:blipFill>
-          <a:blip r:embed="rId2"/>
-          <a:stretch>
-            <a:fillRect/>
-          </a:stretch>
-        </p:blipFill>
-        <p:spPr>
-          <a:xfrm>
-            <a:off x="822960" y="1691640"/>
-            <a:ext cx="10515600" cy="3714563"/>
-          </a:xfrm>
-          <a:prstGeom prst="rect">
-            <a:avLst/>
-          </a:prstGeom>
-        </p:spPr>
-      </p:pic>
+              <a:t>QED 내림차순 상위 6건. 값은 전부 RDKit 산출값이며 사람이 적은 수치가 없다.</a:t>
+            </a:r>
+          </a:p>
+        </p:txBody>
+      </p:sp>
     </p:spTree>
   </p:cSld>
   <p:clrMapOvr>
@@ -4274,7 +5191,7 @@
                 </a:solidFill>
                 <a:latin typeface="Malgun Gothic"/>
               </a:rPr>
-              <a:t>결과</a:t>
+              <a:t>이 실행이 말하지 않는 것</a:t>
             </a:r>
           </a:p>
         </p:txBody>
@@ -4309,398 +5226,21 @@
                 </a:solidFill>
                 <a:latin typeface="Malgun Gothic"/>
               </a:rPr>
-              <a:t>화합물 물성 실계산값</a:t>
-            </a:r>
-          </a:p>
-        </p:txBody>
-      </p:sp>
-      <p:graphicFrame>
-        <p:nvGraphicFramePr>
-          <p:cNvPr id="5" name="Table 4"/>
-          <p:cNvGraphicFramePr>
-            <a:graphicFrameLocks noGrp="1"/>
-          </p:cNvGraphicFramePr>
-          <p:nvPr/>
-        </p:nvGraphicFramePr>
-        <p:xfrm>
-          <a:off x="640080" y="1463040"/>
-          <a:ext cx="10881360" cy="2560320"/>
-        </p:xfrm>
-        <a:graphic>
-          <a:graphicData uri="http://schemas.openxmlformats.org/drawingml/2006/table">
-            <a:tbl>
-              <a:tblPr firstRow="1" bandRow="1">
-                <a:tableStyleId>{5C22544A-7EE6-4342-B048-85BDC9FD1C3A}</a:tableStyleId>
-              </a:tblPr>
-              <a:tblGrid>
-                <a:gridCol w="3627120"/>
-                <a:gridCol w="3627120"/>
-                <a:gridCol w="3627120"/>
-              </a:tblGrid>
-              <a:tr h="365760">
-                <a:tc>
-                  <a:txBody>
-                    <a:bodyPr/>
-                    <a:lstStyle/>
-                    <a:p>
-                      <a:pPr algn="ctr"/>
-                      <a:r>
-                        <a:rPr sz="1000" b="1">
-                          <a:latin typeface="Malgun Gothic"/>
-                        </a:rPr>
-                        <a:t>검사 대상</a:t>
-                      </a:r>
-                    </a:p>
-                  </a:txBody>
-                  <a:tcPr/>
-                </a:tc>
-                <a:tc>
-                  <a:txBody>
-                    <a:bodyPr/>
-                    <a:lstStyle/>
-                    <a:p>
-                      <a:pPr algn="ctr"/>
-                      <a:r>
-                        <a:rPr sz="1000" b="1">
-                          <a:latin typeface="Malgun Gothic"/>
-                        </a:rPr>
-                        <a:t>실행 시점 강제</a:t>
-                      </a:r>
-                    </a:p>
-                  </a:txBody>
-                  <a:tcPr/>
-                </a:tc>
-                <a:tc>
-                  <a:txBody>
-                    <a:bodyPr/>
-                    <a:lstStyle/>
-                    <a:p>
-                      <a:pPr algn="ctr"/>
-                      <a:r>
-                        <a:rPr sz="1000" b="1">
-                          <a:latin typeface="Malgun Gothic"/>
-                        </a:rPr>
-                        <a:t>근거</a:t>
-                      </a:r>
-                    </a:p>
-                  </a:txBody>
-                  <a:tcPr/>
-                </a:tc>
-              </a:tr>
-              <a:tr h="365760">
-                <a:tc>
-                  <a:txBody>
-                    <a:bodyPr/>
-                    <a:lstStyle/>
-                    <a:p>
-                      <a:pPr algn="ctr"/>
-                      <a:r>
-                        <a:rPr sz="1000" b="0">
-                          <a:latin typeface="Malgun Gothic"/>
-                        </a:rPr>
-                        <a:t>target-lookup 게이트</a:t>
-                      </a:r>
-                    </a:p>
-                  </a:txBody>
-                  <a:tcPr/>
-                </a:tc>
-                <a:tc>
-                  <a:txBody>
-                    <a:bodyPr/>
-                    <a:lstStyle/>
-                    <a:p>
-                      <a:pPr algn="ctr"/>
-                      <a:r>
-                        <a:rPr sz="1000" b="0">
-                          <a:latin typeface="Malgun Gothic"/>
-                        </a:rPr>
-                        <a:t>차단함</a:t>
-                      </a:r>
-                    </a:p>
-                  </a:txBody>
-                  <a:tcPr/>
-                </a:tc>
-                <a:tc>
-                  <a:txBody>
-                    <a:bodyPr/>
-                    <a:lstStyle/>
-                    <a:p>
-                      <a:pPr algn="ctr"/>
-                      <a:r>
-                        <a:rPr sz="1000" b="0">
-                          <a:latin typeface="Malgun Gothic"/>
-                        </a:rPr>
-                        <a:t>if env is None or not gate(...): return 1</a:t>
-                      </a:r>
-                    </a:p>
-                  </a:txBody>
-                  <a:tcPr/>
-                </a:tc>
-              </a:tr>
-              <a:tr h="365760">
-                <a:tc>
-                  <a:txBody>
-                    <a:bodyPr/>
-                    <a:lstStyle/>
-                    <a:p>
-                      <a:pPr algn="ctr"/>
-                      <a:r>
-                        <a:rPr sz="1000" b="0">
-                          <a:latin typeface="Malgun Gothic"/>
-                        </a:rPr>
-                        <a:t>chembl-actives 게이트</a:t>
-                      </a:r>
-                    </a:p>
-                  </a:txBody>
-                  <a:tcPr/>
-                </a:tc>
-                <a:tc>
-                  <a:txBody>
-                    <a:bodyPr/>
-                    <a:lstStyle/>
-                    <a:p>
-                      <a:pPr algn="ctr"/>
-                      <a:r>
-                        <a:rPr sz="1000" b="0">
-                          <a:latin typeface="Malgun Gothic"/>
-                        </a:rPr>
-                        <a:t>차단함</a:t>
-                      </a:r>
-                    </a:p>
-                  </a:txBody>
-                  <a:tcPr/>
-                </a:tc>
-                <a:tc>
-                  <a:txBody>
-                    <a:bodyPr/>
-                    <a:lstStyle/>
-                    <a:p>
-                      <a:pPr algn="ctr"/>
-                      <a:r>
-                        <a:rPr sz="1000" b="0">
-                          <a:latin typeface="Malgun Gothic"/>
-                        </a:rPr>
-                        <a:t>동일</a:t>
-                      </a:r>
-                    </a:p>
-                  </a:txBody>
-                  <a:tcPr/>
-                </a:tc>
-              </a:tr>
-              <a:tr h="365760">
-                <a:tc>
-                  <a:txBody>
-                    <a:bodyPr/>
-                    <a:lstStyle/>
-                    <a:p>
-                      <a:pPr algn="ctr"/>
-                      <a:r>
-                        <a:rPr sz="1000" b="0">
-                          <a:latin typeface="Malgun Gothic"/>
-                        </a:rPr>
-                        <a:t>mol-properties 게이트</a:t>
-                      </a:r>
-                    </a:p>
-                  </a:txBody>
-                  <a:tcPr/>
-                </a:tc>
-                <a:tc>
-                  <a:txBody>
-                    <a:bodyPr/>
-                    <a:lstStyle/>
-                    <a:p>
-                      <a:pPr algn="ctr"/>
-                      <a:r>
-                        <a:rPr sz="1000" b="0">
-                          <a:latin typeface="Malgun Gothic"/>
-                        </a:rPr>
-                        <a:t>차단함</a:t>
-                      </a:r>
-                    </a:p>
-                  </a:txBody>
-                  <a:tcPr/>
-                </a:tc>
-                <a:tc>
-                  <a:txBody>
-                    <a:bodyPr/>
-                    <a:lstStyle/>
-                    <a:p>
-                      <a:pPr algn="ctr"/>
-                      <a:r>
-                        <a:rPr sz="1000" b="0">
-                          <a:latin typeface="Malgun Gothic"/>
-                        </a:rPr>
-                        <a:t>동일. 단 약물성 판정(gate_pass)은 verification.passed 에 포함되지 않아 10건 전부 탈락해도 이 단계는 통과한다</a:t>
-                      </a:r>
-                    </a:p>
-                  </a:txBody>
-                  <a:tcPr/>
-                </a:tc>
-              </a:tr>
-              <a:tr h="365760">
-                <a:tc>
-                  <a:txBody>
-                    <a:bodyPr/>
-                    <a:lstStyle/>
-                    <a:p>
-                      <a:pPr algn="ctr"/>
-                      <a:r>
-                        <a:rPr sz="1000" b="0">
-                          <a:latin typeface="Malgun Gothic"/>
-                        </a:rPr>
-                        <a:t>selectivity 게이트</a:t>
-                      </a:r>
-                    </a:p>
-                  </a:txBody>
-                  <a:tcPr/>
-                </a:tc>
-                <a:tc>
-                  <a:txBody>
-                    <a:bodyPr/>
-                    <a:lstStyle/>
-                    <a:p>
-                      <a:pPr algn="ctr"/>
-                      <a:r>
-                        <a:rPr sz="1000" b="0">
-                          <a:latin typeface="Malgun Gothic"/>
-                        </a:rPr>
-                        <a:t>차단하지 않았음</a:t>
-                      </a:r>
-                    </a:p>
-                  </a:txBody>
-                  <a:tcPr/>
-                </a:tc>
-                <a:tc>
-                  <a:txBody>
-                    <a:bodyPr/>
-                    <a:lstStyle/>
-                    <a:p>
-                      <a:pPr algn="ctr"/>
-                      <a:r>
-                        <a:rPr sz="1000" b="0">
-                          <a:latin typeface="Malgun Gothic"/>
-                        </a:rPr>
-                        <a:t>반환값을 버림 (if env is not None: gate(...))</a:t>
-                      </a:r>
-                    </a:p>
-                  </a:txBody>
-                  <a:tcPr/>
-                </a:tc>
-              </a:tr>
-              <a:tr h="365760">
-                <a:tc>
-                  <a:txBody>
-                    <a:bodyPr/>
-                    <a:lstStyle/>
-                    <a:p>
-                      <a:pPr algn="ctr"/>
-                      <a:r>
-                        <a:rPr sz="1000" b="0">
-                          <a:latin typeface="Malgun Gothic"/>
-                        </a:rPr>
-                        <a:t>selectivity 검사 항목</a:t>
-                      </a:r>
-                    </a:p>
-                  </a:txBody>
-                  <a:tcPr/>
-                </a:tc>
-                <a:tc>
-                  <a:txBody>
-                    <a:bodyPr/>
-                    <a:lstStyle/>
-                    <a:p>
-                      <a:pPr algn="ctr"/>
-                      <a:r>
-                        <a:rPr sz="1000" b="0">
-                          <a:latin typeface="Malgun Gothic"/>
-                        </a:rPr>
-                        <a:t>반증 불가능했음</a:t>
-                      </a:r>
-                    </a:p>
-                  </a:txBody>
-                  <a:tcPr/>
-                </a:tc>
-                <a:tc>
-                  <a:txBody>
-                    <a:bodyPr/>
-                    <a:lstStyle/>
-                    <a:p>
-                      <a:pPr algn="ctr"/>
-                      <a:r>
-                        <a:rPr sz="1000" b="0">
-                          <a:latin typeface="Malgun Gothic"/>
-                        </a:rPr>
-                        <a:t>4개 항목이 전부 모듈 리터럴 상수를 읽음. 쓰레기 SMILES 입력으로도 passed=True</a:t>
-                      </a:r>
-                    </a:p>
-                  </a:txBody>
-                  <a:tcPr/>
-                </a:tc>
-              </a:tr>
-              <a:tr h="365760">
-                <a:tc>
-                  <a:txBody>
-                    <a:bodyPr/>
-                    <a:lstStyle/>
-                    <a:p>
-                      <a:pPr algn="ctr"/>
-                      <a:r>
-                        <a:rPr sz="1000" b="0">
-                          <a:latin typeface="Malgun Gothic"/>
-                        </a:rPr>
-                        <a:t>report 게이트 (numbers_backed)</a:t>
-                      </a:r>
-                    </a:p>
-                  </a:txBody>
-                  <a:tcPr/>
-                </a:tc>
-                <a:tc>
-                  <a:txBody>
-                    <a:bodyPr/>
-                    <a:lstStyle/>
-                    <a:p>
-                      <a:pPr algn="ctr"/>
-                      <a:r>
-                        <a:rPr sz="1000" b="0">
-                          <a:latin typeface="Malgun Gothic"/>
-                        </a:rPr>
-                        <a:t>실행되지 않음</a:t>
-                      </a:r>
-                    </a:p>
-                  </a:txBody>
-                  <a:tcPr/>
-                </a:tc>
-                <a:tc>
-                  <a:txBody>
-                    <a:bodyPr/>
-                    <a:lstStyle/>
-                    <a:p>
-                      <a:pPr algn="ctr"/>
-                      <a:r>
-                        <a:rPr sz="1000" b="0">
-                          <a:latin typeface="Malgun Gothic"/>
-                        </a:rPr>
-                        <a:t>실행 코드에 호출자 0곳</a:t>
-                      </a:r>
-                    </a:p>
-                  </a:txBody>
-                  <a:tcPr/>
-                </a:tc>
-              </a:tr>
-            </a:tbl>
-          </a:graphicData>
-        </a:graphic>
-      </p:graphicFrame>
-      <p:sp>
-        <p:nvSpPr>
-          <p:cNvPr id="6" name="TextBox 5"/>
+              <a:t>한계</a:t>
+            </a:r>
+          </a:p>
+        </p:txBody>
+      </p:sp>
+      <p:sp>
+        <p:nvSpPr>
+          <p:cNvPr id="5" name="TextBox 4"/>
           <p:cNvSpPr txBox="1"/>
           <p:nvPr/>
         </p:nvSpPr>
         <p:spPr>
           <a:xfrm>
-            <a:off x="640080" y="4178808"/>
-            <a:ext cx="10881360" cy="548640"/>
+            <a:off x="822960" y="1554480"/>
+            <a:ext cx="10607040" cy="3108960"/>
           </a:xfrm>
           <a:prstGeom prst="rect">
             <a:avLst/>
@@ -4715,13 +5255,144 @@
           <a:p>
             <a:pPr algn="l"/>
             <a:r>
+              <a:rPr sz="1300" b="0">
+                <a:solidFill>
+                  <a:srgbClr val="0B2A4A"/>
+                </a:solidFill>
+                <a:latin typeface="Malgun Gothic"/>
+              </a:rPr>
+              <a:t>1.  대조군이 없다.</a:t>
+            </a:r>
+          </a:p>
+          <a:p>
+            <a:pPr algn="l"/>
+            <a:r>
+              <a:rPr sz="1300" b="0">
+                <a:solidFill>
+                  <a:srgbClr val="0B2A4A"/>
+                </a:solidFill>
+                <a:latin typeface="Malgun Gothic"/>
+              </a:rPr>
+              <a:t>     문서-전용 조건을 실행하지 않았으므로 '문서보다 코드가 낫다'는 비교 주장은 하지 않는다.</a:t>
+            </a:r>
+          </a:p>
+          <a:p>
+            <a:pPr algn="l"/>
+            <a:r>
+              <a:rPr sz="1300" b="0">
+                <a:solidFill>
+                  <a:srgbClr val="0B2A4A"/>
+                </a:solidFill>
+                <a:latin typeface="Malgun Gothic"/>
+              </a:rPr>
+              <a:t/>
+            </a:r>
+          </a:p>
+          <a:p>
+            <a:pPr algn="l"/>
+            <a:r>
+              <a:rPr sz="1300" b="0">
+                <a:solidFill>
+                  <a:srgbClr val="0B2A4A"/>
+                </a:solidFill>
+                <a:latin typeface="Malgun Gothic"/>
+              </a:rPr>
+              <a:t>2.  수정 후에도 selectivity 검사 5개가 이 실행에서는 공허하게 통과한다.</a:t>
+            </a:r>
+          </a:p>
+          <a:p>
+            <a:pPr algn="l"/>
+            <a:r>
+              <a:rPr sz="1300" b="0">
+                <a:solidFill>
+                  <a:srgbClr val="0B2A4A"/>
+                </a:solidFill>
+                <a:latin typeface="Malgun Gothic"/>
+              </a:rPr>
+              <a:t>     파이프라인이 SMILES 를 넘기지 않아 입력 의존 검사가 발동하지 않는다.</a:t>
+            </a:r>
+          </a:p>
+          <a:p>
+            <a:pPr algn="l"/>
+            <a:r>
+              <a:rPr sz="1300" b="0">
+                <a:solidFill>
+                  <a:srgbClr val="0B2A4A"/>
+                </a:solidFill>
+                <a:latin typeface="Malgun Gothic"/>
+              </a:rPr>
+              <a:t/>
+            </a:r>
+          </a:p>
+          <a:p>
+            <a:pPr algn="l"/>
+            <a:r>
+              <a:rPr sz="1300" b="0">
+                <a:solidFill>
+                  <a:srgbClr val="0B2A4A"/>
+                </a:solidFill>
+                <a:latin typeface="Malgun Gothic"/>
+              </a:rPr>
+              <a:t>3.  단일 실행이며 반복이 없다. 통계 추론을 하지 않았다.</a:t>
+            </a:r>
+          </a:p>
+          <a:p>
+            <a:pPr algn="l"/>
+            <a:r>
+              <a:rPr sz="1300" b="0">
+                <a:solidFill>
+                  <a:srgbClr val="0B2A4A"/>
+                </a:solidFill>
+                <a:latin typeface="Malgun Gothic"/>
+              </a:rPr>
+              <a:t/>
+            </a:r>
+          </a:p>
+          <a:p>
+            <a:pPr algn="l"/>
+            <a:r>
+              <a:rPr sz="1300" b="0">
+                <a:solidFill>
+                  <a:srgbClr val="0B2A4A"/>
+                </a:solidFill>
+                <a:latin typeface="Malgun Gothic"/>
+              </a:rPr>
+              <a:t>4.  화합물 10건은 정렬 미지정 조회의 앞부분이고 단일 화학형 계열에 가깝다.</a:t>
+            </a:r>
+          </a:p>
+        </p:txBody>
+      </p:sp>
+      <p:sp>
+        <p:nvSpPr>
+          <p:cNvPr id="6" name="TextBox 5"/>
+          <p:cNvSpPr txBox="1"/>
+          <p:nvPr/>
+        </p:nvSpPr>
+        <p:spPr>
+          <a:xfrm>
+            <a:off x="822960" y="5029200"/>
+            <a:ext cx="10607040" cy="822960"/>
+          </a:xfrm>
+          <a:prstGeom prst="rect">
+            <a:avLst/>
+          </a:prstGeom>
+          <a:noFill/>
+        </p:spPr>
+        <p:txBody>
+          <a:bodyPr wrap="square">
+            <a:spAutoFit/>
+          </a:bodyPr>
+          <a:lstStyle/>
+          <a:p>
+            <a:pPr algn="l"/>
+            <a:r>
               <a:rPr sz="1100" b="0">
                 <a:solidFill>
                   <a:srgbClr val="5A636B"/>
                 </a:solidFill>
                 <a:latin typeface="Malgun Gothic"/>
               </a:rPr>
-              <a:t>QED 내림차순 상위 6건. 값은 전부 RDKit 산출값이며 사람이 적은 수치가 없다.</a:t>
+              <a:t>게이트 통과는 규약 준수를 뜻할 뿐 화합물이 유망하다는 뜻이 아니다.</a:t>
             </a:r>
           </a:p>
         </p:txBody>
@@ -4817,7 +5488,7 @@
                 </a:solidFill>
                 <a:latin typeface="Malgun Gothic"/>
               </a:rPr>
-              <a:t>이 실행이 말하지 않는 것</a:t>
+              <a:t>정리</a:t>
             </a:r>
           </a:p>
         </p:txBody>
@@ -4852,303 +5523,6 @@
                 </a:solidFill>
                 <a:latin typeface="Malgun Gothic"/>
               </a:rPr>
-              <a:t>한계</a:t>
-            </a:r>
-          </a:p>
-        </p:txBody>
-      </p:sp>
-      <p:sp>
-        <p:nvSpPr>
-          <p:cNvPr id="5" name="TextBox 4"/>
-          <p:cNvSpPr txBox="1"/>
-          <p:nvPr/>
-        </p:nvSpPr>
-        <p:spPr>
-          <a:xfrm>
-            <a:off x="822960" y="1554480"/>
-            <a:ext cx="10607040" cy="3108960"/>
-          </a:xfrm>
-          <a:prstGeom prst="rect">
-            <a:avLst/>
-          </a:prstGeom>
-          <a:noFill/>
-        </p:spPr>
-        <p:txBody>
-          <a:bodyPr wrap="square">
-            <a:spAutoFit/>
-          </a:bodyPr>
-          <a:lstStyle/>
-          <a:p>
-            <a:pPr algn="l"/>
-            <a:r>
-              <a:rPr sz="1300" b="0">
-                <a:solidFill>
-                  <a:srgbClr val="0B2A4A"/>
-                </a:solidFill>
-                <a:latin typeface="Malgun Gothic"/>
-              </a:rPr>
-              <a:t>1.  대조군이 없다.</a:t>
-            </a:r>
-          </a:p>
-          <a:p>
-            <a:pPr algn="l"/>
-            <a:r>
-              <a:rPr sz="1300" b="0">
-                <a:solidFill>
-                  <a:srgbClr val="0B2A4A"/>
-                </a:solidFill>
-                <a:latin typeface="Malgun Gothic"/>
-              </a:rPr>
-              <a:t>     문서-전용 조건을 실행하지 않았으므로 '문서보다 코드가 낫다'는 비교 주장은 하지 않는다.</a:t>
-            </a:r>
-          </a:p>
-          <a:p>
-            <a:pPr algn="l"/>
-            <a:r>
-              <a:rPr sz="1300" b="0">
-                <a:solidFill>
-                  <a:srgbClr val="0B2A4A"/>
-                </a:solidFill>
-                <a:latin typeface="Malgun Gothic"/>
-              </a:rPr>
-              <a:t/>
-            </a:r>
-          </a:p>
-          <a:p>
-            <a:pPr algn="l"/>
-            <a:r>
-              <a:rPr sz="1300" b="0">
-                <a:solidFill>
-                  <a:srgbClr val="0B2A4A"/>
-                </a:solidFill>
-                <a:latin typeface="Malgun Gothic"/>
-              </a:rPr>
-              <a:t>2.  수정 후에도 selectivity 검사 5개가 이 실행에서는 공허하게 통과한다.</a:t>
-            </a:r>
-          </a:p>
-          <a:p>
-            <a:pPr algn="l"/>
-            <a:r>
-              <a:rPr sz="1300" b="0">
-                <a:solidFill>
-                  <a:srgbClr val="0B2A4A"/>
-                </a:solidFill>
-                <a:latin typeface="Malgun Gothic"/>
-              </a:rPr>
-              <a:t>     파이프라인이 SMILES 를 넘기지 않아 입력 의존 검사가 발동하지 않는다.</a:t>
-            </a:r>
-          </a:p>
-          <a:p>
-            <a:pPr algn="l"/>
-            <a:r>
-              <a:rPr sz="1300" b="0">
-                <a:solidFill>
-                  <a:srgbClr val="0B2A4A"/>
-                </a:solidFill>
-                <a:latin typeface="Malgun Gothic"/>
-              </a:rPr>
-              <a:t/>
-            </a:r>
-          </a:p>
-          <a:p>
-            <a:pPr algn="l"/>
-            <a:r>
-              <a:rPr sz="1300" b="0">
-                <a:solidFill>
-                  <a:srgbClr val="0B2A4A"/>
-                </a:solidFill>
-                <a:latin typeface="Malgun Gothic"/>
-              </a:rPr>
-              <a:t>3.  단일 실행이며 반복이 없다. 통계 추론을 하지 않았다.</a:t>
-            </a:r>
-          </a:p>
-          <a:p>
-            <a:pPr algn="l"/>
-            <a:r>
-              <a:rPr sz="1300" b="0">
-                <a:solidFill>
-                  <a:srgbClr val="0B2A4A"/>
-                </a:solidFill>
-                <a:latin typeface="Malgun Gothic"/>
-              </a:rPr>
-              <a:t/>
-            </a:r>
-          </a:p>
-          <a:p>
-            <a:pPr algn="l"/>
-            <a:r>
-              <a:rPr sz="1300" b="0">
-                <a:solidFill>
-                  <a:srgbClr val="0B2A4A"/>
-                </a:solidFill>
-                <a:latin typeface="Malgun Gothic"/>
-              </a:rPr>
-              <a:t>4.  화합물 10건은 정렬 미지정 조회의 앞부분이고 단일 화학형 계열에 가깝다.</a:t>
-            </a:r>
-          </a:p>
-        </p:txBody>
-      </p:sp>
-      <p:sp>
-        <p:nvSpPr>
-          <p:cNvPr id="6" name="TextBox 5"/>
-          <p:cNvSpPr txBox="1"/>
-          <p:nvPr/>
-        </p:nvSpPr>
-        <p:spPr>
-          <a:xfrm>
-            <a:off x="822960" y="5029200"/>
-            <a:ext cx="10607040" cy="822960"/>
-          </a:xfrm>
-          <a:prstGeom prst="rect">
-            <a:avLst/>
-          </a:prstGeom>
-          <a:noFill/>
-        </p:spPr>
-        <p:txBody>
-          <a:bodyPr wrap="square">
-            <a:spAutoFit/>
-          </a:bodyPr>
-          <a:lstStyle/>
-          <a:p>
-            <a:pPr algn="l"/>
-            <a:r>
-              <a:rPr sz="1100" b="0">
-                <a:solidFill>
-                  <a:srgbClr val="5A636B"/>
-                </a:solidFill>
-                <a:latin typeface="Malgun Gothic"/>
-              </a:rPr>
-              <a:t>게이트 통과는 규약 준수를 뜻할 뿐 화합물이 유망하다는 뜻이 아니다.</a:t>
-            </a:r>
-          </a:p>
-        </p:txBody>
-      </p:sp>
-    </p:spTree>
-  </p:cSld>
-  <p:clrMapOvr>
-    <a:masterClrMapping/>
-  </p:clrMapOvr>
-</p:sld>
-</file>
-
-<file path=ppt/slides/slide9.xml><?xml version="1.0" encoding="utf-8"?>
-<p:sld xmlns:a="http://schemas.openxmlformats.org/drawingml/2006/main" xmlns:p="http://schemas.openxmlformats.org/presentationml/2006/main" xmlns:r="http://schemas.openxmlformats.org/officeDocument/2006/relationships">
-  <p:cSld>
-    <p:spTree>
-      <p:nvGrpSpPr>
-        <p:cNvPr id="1" name=""/>
-        <p:cNvGrpSpPr/>
-        <p:nvPr/>
-      </p:nvGrpSpPr>
-      <p:grpSpPr/>
-      <p:sp>
-        <p:nvSpPr>
-          <p:cNvPr id="2" name="Rectangle 1"/>
-          <p:cNvSpPr/>
-          <p:nvPr/>
-        </p:nvSpPr>
-        <p:spPr>
-          <a:xfrm>
-            <a:off x="0" y="0"/>
-            <a:ext cx="12191695" cy="109728"/>
-          </a:xfrm>
-          <a:prstGeom prst="rect">
-            <a:avLst/>
-          </a:prstGeom>
-          <a:solidFill>
-            <a:srgbClr val="009CD8"/>
-          </a:solidFill>
-          <a:ln>
-            <a:noFill/>
-          </a:ln>
-        </p:spPr>
-        <p:style>
-          <a:lnRef idx="1">
-            <a:schemeClr val="accent1"/>
-          </a:lnRef>
-          <a:fillRef idx="3">
-            <a:schemeClr val="accent1"/>
-          </a:fillRef>
-          <a:effectRef idx="2">
-            <a:schemeClr val="accent1"/>
-          </a:effectRef>
-          <a:fontRef idx="minor">
-            <a:schemeClr val="lt1"/>
-          </a:fontRef>
-        </p:style>
-        <p:txBody>
-          <a:bodyPr rtlCol="0" anchor="ctr"/>
-          <a:lstStyle/>
-          <a:p>
-            <a:pPr algn="ctr"/>
-          </a:p>
-        </p:txBody>
-      </p:sp>
-      <p:sp>
-        <p:nvSpPr>
-          <p:cNvPr id="3" name="TextBox 2"/>
-          <p:cNvSpPr txBox="1"/>
-          <p:nvPr/>
-        </p:nvSpPr>
-        <p:spPr>
-          <a:xfrm>
-            <a:off x="548640" y="219456"/>
-            <a:ext cx="10789920" cy="310896"/>
-          </a:xfrm>
-          <a:prstGeom prst="rect">
-            <a:avLst/>
-          </a:prstGeom>
-          <a:noFill/>
-        </p:spPr>
-        <p:txBody>
-          <a:bodyPr wrap="square">
-            <a:spAutoFit/>
-          </a:bodyPr>
-          <a:lstStyle/>
-          <a:p>
-            <a:pPr algn="l"/>
-            <a:r>
-              <a:rPr sz="1100" b="1">
-                <a:solidFill>
-                  <a:srgbClr val="009CD8"/>
-                </a:solidFill>
-                <a:latin typeface="Malgun Gothic"/>
-              </a:rPr>
-              <a:t>정리</a:t>
-            </a:r>
-          </a:p>
-        </p:txBody>
-      </p:sp>
-      <p:sp>
-        <p:nvSpPr>
-          <p:cNvPr id="4" name="TextBox 3"/>
-          <p:cNvSpPr txBox="1"/>
-          <p:nvPr/>
-        </p:nvSpPr>
-        <p:spPr>
-          <a:xfrm>
-            <a:off x="548640" y="530352"/>
-            <a:ext cx="11064240" cy="822960"/>
-          </a:xfrm>
-          <a:prstGeom prst="rect">
-            <a:avLst/>
-          </a:prstGeom>
-          <a:noFill/>
-        </p:spPr>
-        <p:txBody>
-          <a:bodyPr wrap="square">
-            <a:spAutoFit/>
-          </a:bodyPr>
-          <a:lstStyle/>
-          <a:p>
-            <a:pPr algn="l"/>
-            <a:r>
-              <a:rPr sz="2200" b="1">
-                <a:solidFill>
-                  <a:srgbClr val="0B2A4A"/>
-                </a:solidFill>
-                <a:latin typeface="Malgun Gothic"/>
-              </a:rPr>
               <a:t>결론</a:t>
             </a:r>
           </a:p>
@@ -5184,7 +5558,7 @@
                 </a:solidFill>
                 <a:latin typeface="Malgun Gothic"/>
               </a:rPr>
-              <a:t>1.  통과만 본 게이트는 검증된 것이 아니다.</a:t>
+              <a:t>1.  자세 생성은 작동했고 채점이 작동하지 않았다.</a:t>
             </a:r>
           </a:p>
           <a:p>
